--- a/LIFEX_YUNO_HOME_202609-1020.pptx
+++ b/LIFEX_YUNO_HOME_202609-1020.pptx
@@ -8211,7 +8211,7 @@
             <a:avLst/>
           </a:prstGeom>
           <a:solidFill>
-            <a:srgbClr val="F96167"/>
+            <a:srgbClr val="E8A33D"/>
           </a:solidFill>
           <a:ln/>
         </p:spPr>
@@ -8249,7 +8249,7 @@
                 <a:ea typeface="Yu Gothic" pitchFamily="34" charset="-122"/>
                 <a:cs typeface="Yu Gothic" pitchFamily="34" charset="-120"/>
               </a:rPr>
-              <a:t>！</a:t>
+              <a:t>→</a:t>
             </a:r>
             <a:endParaRPr lang="en-US" sz="1300" dirty="0"/>
           </a:p>
@@ -8288,7 +8288,7 @@
                 <a:ea typeface="Yu Gothic" pitchFamily="34" charset="-122"/>
                 <a:cs typeface="Yu Gothic" pitchFamily="34" charset="-120"/>
               </a:rPr>
-              <a:t>SHO-SANのP-MAXは9/21〜9/30の10日で¥72,316を使い、9/16〜10/31の通し予算¥138,000の52%を9月中に消化。</a:t>
+              <a:t>SHO-SANのP-MAXは9/21〜9/30の10日で¥72,316を配信。10月は貴社のご依頼により予算を減額して配信。</a:t>
             </a:r>
             <a:endParaRPr lang="en-US" sz="1200" dirty="0"/>
           </a:p>
@@ -8713,7 +8713,7 @@
                 <a:ea typeface="Yu Gothic" pitchFamily="34" charset="-122"/>
                 <a:cs typeface="Yu Gothic" pitchFamily="34" charset="-120"/>
               </a:rPr>
-              <a:t>9月 ¥150,115（10月は20日間）</a:t>
+              <a:t>9月 ¥150,115（ご依頼により減額）</a:t>
             </a:r>
             <a:endParaRPr lang="en-US" sz="1050" dirty="0"/>
           </a:p>
@@ -9267,7 +9267,7 @@
                 <a:ea typeface="Yu Gothic" pitchFamily="34" charset="-122"/>
                 <a:cs typeface="Yu Gothic" pitchFamily="34" charset="-120"/>
               </a:rPr>
-              <a:t>最大の課題は配信量。1日あたりの費用は¥1,455で、9月後半（1日約¥7,232）の約1/5。通し予算の半分を9月に使ったため、10月の配信が絞られていると考えられる。</a:t>
+              <a:t>最大の課題はクリック率。9月1.59%→10月0.95%に低下。動画視聴などクリック以外の反応が6,261回（9月934回）に増えており、検索以外の面への配信が増えた可能性がある。</a:t>
             </a:r>
             <a:endParaRPr lang="en-US" sz="1200" dirty="0"/>
           </a:p>
@@ -9365,7 +9365,7 @@
                 <a:ea typeface="Yu Gothic" pitchFamily="34" charset="-122"/>
                 <a:cs typeface="Yu Gothic" pitchFamily="34" charset="-120"/>
               </a:rPr>
-              <a:t>表示は39,476回と増えたが、クリック率は0.95%に低下。動画視聴などクリック以外の反応が6,261回（9月934回）に増えており、検索以外の面への配信が増えた可能性がある。</a:t>
+              <a:t>LPからアプリへ進むのは13.7%で、LIFE X全体（13.3%）と同じ水準。LPを見た人の8割以上がアプリまで進んでいない。</a:t>
             </a:r>
             <a:endParaRPr lang="en-US" sz="1200" dirty="0"/>
           </a:p>
@@ -9659,7 +9659,7 @@
                 <a:ea typeface="Yu Gothic" pitchFamily="34" charset="-122"/>
                 <a:cs typeface="Yu Gothic" pitchFamily="34" charset="-120"/>
               </a:rPr>
-              <a:t>改善の柱は ①予算を月単位にして配信量を戻す ②P-MAXの配信面を確認する ③LPで「来場予約」を目立たせる、の3つ。</a:t>
+              <a:t>予算は貴社のご依頼で減額中のため、今の予算内で効率を上げる。改善の柱は ①P-MAXの配信面を確認する ②LPで「来場予約」を目立たせる、の2つ。</a:t>
             </a:r>
             <a:endParaRPr lang="en-US" sz="1200" dirty="0"/>
           </a:p>
@@ -16778,7 +16778,7 @@
                       <a:r>
                         <a:rPr lang="en-US" sz="1200" b="1" dirty="0">
                           <a:solidFill>
-                            <a:srgbClr val="F96167"/>
+                            <a:srgbClr val="6B7280"/>
                           </a:solidFill>
                           <a:latin typeface="Yu Gothic" pitchFamily="34" charset="0"/>
                           <a:ea typeface="Yu Gothic" pitchFamily="34" charset="-122"/>
@@ -16846,13 +16846,13 @@
                       <a:r>
                         <a:rPr lang="en-US" sz="1200" b="1" dirty="0">
                           <a:solidFill>
-                            <a:srgbClr val="F96167"/>
+                            <a:srgbClr val="6B7280"/>
                           </a:solidFill>
                           <a:latin typeface="Yu Gothic" pitchFamily="34" charset="0"/>
                           <a:ea typeface="Yu Gothic" pitchFamily="34" charset="-122"/>
                           <a:cs typeface="Yu Gothic" pitchFamily="34" charset="-120"/>
                         </a:rPr>
-                        <a:t>× 最大の課題</a:t>
+                        <a:t>－ ご依頼で減額</a:t>
                       </a:r>
                       <a:endParaRPr lang="en-US" sz="1200" dirty="0">
                         <a:latin typeface="Yu Gothic" charset="0"/>
@@ -17530,13 +17530,13 @@
                       <a:r>
                         <a:rPr lang="en-US" sz="1200" b="1" dirty="0">
                           <a:solidFill>
-                            <a:srgbClr val="E8A33D"/>
+                            <a:srgbClr val="F96167"/>
                           </a:solidFill>
                           <a:latin typeface="Yu Gothic" pitchFamily="34" charset="0"/>
                           <a:ea typeface="Yu Gothic" pitchFamily="34" charset="-122"/>
                           <a:cs typeface="Yu Gothic" pitchFamily="34" charset="-120"/>
                         </a:rPr>
-                        <a:t>△ 9月から低下</a:t>
+                        <a:t>× 最大の課題</a:t>
                       </a:r>
                       <a:endParaRPr lang="en-US" sz="1200" dirty="0">
                         <a:latin typeface="Yu Gothic" charset="0"/>
@@ -17878,7 +17878,7 @@
                           <a:ea typeface="Yu Gothic" pitchFamily="34" charset="-122"/>
                           <a:cs typeface="Yu Gothic" pitchFamily="34" charset="-120"/>
                         </a:rPr>
-                        <a:t>△ 共通の課題</a:t>
+                        <a:t>△ 2番目の課題</a:t>
                       </a:r>
                       <a:endParaRPr lang="en-US" sz="1200" dirty="0">
                         <a:latin typeface="Yu Gothic" charset="0"/>
@@ -18334,7 +18334,7 @@
                 <a:ea typeface="Yu Gothic" pitchFamily="34" charset="-122"/>
                 <a:cs typeface="Yu Gothic" pitchFamily="34" charset="-120"/>
               </a:rPr>
-              <a:t>最大の課題：① 配信量</a:t>
+              <a:t>最大の課題：③ クリック率（配信面の変化）</a:t>
             </a:r>
             <a:endParaRPr lang="en-US" sz="1400" dirty="0"/>
           </a:p>
@@ -18354,7 +18354,7 @@
                 <a:ea typeface="Yu Gothic" pitchFamily="34" charset="-122"/>
                 <a:cs typeface="Yu Gothic" pitchFamily="34" charset="-120"/>
               </a:rPr>
-              <a:t>SHO-SANのP-MAXは9/16〜10/31の通し予算¥138,000。9月後半の10日で¥72,316（52%）を使い、10/20までの累計は¥101,407（73%）。10月は1日¥1,455まで落ちている。表示単価・クリック単価は他加盟店より安く、配信を戻せばクリックは増やせる。</a:t>
+              <a:t>クリック率は9月1.59%→10月0.95%。クリック以外の反応（動画視聴など）は934回→6,261回と約7倍で、検索以外（YouTube・ディスプレイ等）に配信が寄った可能性がある。チャネル別の内訳で確認したうえで、検索テーマ（キーワードの手がかり）の追加を検討する。</a:t>
             </a:r>
             <a:endParaRPr lang="en-US" sz="1400" dirty="0"/>
           </a:p>
@@ -18418,7 +18418,7 @@
                 <a:ea typeface="Yu Gothic" pitchFamily="34" charset="-122"/>
                 <a:cs typeface="Yu Gothic" pitchFamily="34" charset="-120"/>
               </a:rPr>
-              <a:t>2番目の課題：③ 配信面の変化</a:t>
+              <a:t>2番目の課題：④ LP → アプリ</a:t>
             </a:r>
             <a:endParaRPr lang="en-US" sz="1400" dirty="0"/>
           </a:p>
@@ -18438,7 +18438,7 @@
                 <a:ea typeface="Yu Gothic" pitchFamily="34" charset="-122"/>
                 <a:cs typeface="Yu Gothic" pitchFamily="34" charset="-120"/>
               </a:rPr>
-              <a:t>クリック率は9月1.59%→10月0.95%。クリック以外の反応（動画視聴など）は934回→6,261回と約7倍で、検索以外（YouTube・ディスプレイ等）に配信が寄った可能性がある。チャネル別の内訳で確認したうえで、検索テーマ（キーワードの手がかり）の追加を検討する。</a:t>
+              <a:t>LPからアプリへ進むのは13.7%で、LIFE X全体（13.3%）と同じ水準＝LPを見た人の8割以上はアプリまで進んでいない。アプリ→来場予約ページは27.1%と強いので、LPの段階で「来場予約」を見せられれば来場予約を伸ばせる。</a:t>
             </a:r>
             <a:endParaRPr lang="en-US" sz="1400" dirty="0"/>
           </a:p>
@@ -23011,7 +23011,7 @@
                 <a:ea typeface="Yu Gothic" pitchFamily="34" charset="-122"/>
                 <a:cs typeface="Yu Gothic" pitchFamily="34" charset="-120"/>
               </a:rPr>
-              <a:t>10/20時点で通し予算の73%を消化。9月後半に多く使ったぶん、10月は1日あたりの配信量が小さくなっている。</a:t>
+              <a:t>10/20時点で通し予算の73%を消化。10月は貴社のご依頼により予算を減額して配信しているため、1日あたりの配信量は9月後半より小さい。</a:t>
             </a:r>
             <a:endParaRPr lang="en-US" sz="1150" dirty="0"/>
           </a:p>
@@ -23246,14 +23246,14 @@
       </p:sp>
       <p:sp>
         <p:nvSpPr>
-          <p:cNvPr id="4" name="Shape 2"/>
+          <p:cNvPr id="10" name="Shape 8"/>
           <p:cNvSpPr/>
           <p:nvPr/>
         </p:nvSpPr>
         <p:spPr>
           <a:xfrm>
             <a:off x="548640" y="1097280"/>
-            <a:ext cx="11091672" cy="932688"/>
+            <a:ext cx="11091672" cy="1115568"/>
           </a:xfrm>
           <a:prstGeom prst="roundRect">
             <a:avLst>
@@ -23273,13 +23273,13 @@
       </p:sp>
       <p:sp>
         <p:nvSpPr>
-          <p:cNvPr id="5" name="Shape 3"/>
+          <p:cNvPr id="11" name="Shape 9"/>
           <p:cNvSpPr/>
           <p:nvPr/>
         </p:nvSpPr>
         <p:spPr>
           <a:xfrm>
-            <a:off x="685800" y="1225296"/>
+            <a:off x="685800" y="1316736"/>
             <a:ext cx="868680" cy="310896"/>
           </a:xfrm>
           <a:prstGeom prst="roundRect">
@@ -23295,13 +23295,13 @@
       </p:sp>
       <p:sp>
         <p:nvSpPr>
-          <p:cNvPr id="6" name="Text 4"/>
+          <p:cNvPr id="12" name="Text 10"/>
           <p:cNvSpPr/>
           <p:nvPr/>
         </p:nvSpPr>
         <p:spPr>
           <a:xfrm>
-            <a:off x="685800" y="1225296"/>
+            <a:off x="685800" y="1316736"/>
             <a:ext cx="868680" cy="310896"/>
           </a:xfrm>
           <a:prstGeom prst="rect">
@@ -23334,221 +23334,13 @@
       </p:sp>
       <p:sp>
         <p:nvSpPr>
-          <p:cNvPr id="7" name="Text 5"/>
-          <p:cNvSpPr/>
-          <p:nvPr/>
-        </p:nvSpPr>
-        <p:spPr>
-          <a:xfrm>
-            <a:off x="1691640" y="1188720"/>
-            <a:ext cx="4206240" cy="384048"/>
-          </a:xfrm>
-          <a:prstGeom prst="rect">
-            <a:avLst/>
-          </a:prstGeom>
-          <a:noFill/>
-          <a:ln/>
-        </p:spPr>
-        <p:txBody>
-          <a:bodyPr wrap="square" lIns="0" tIns="0" rIns="0" bIns="0" rtlCol="0" anchor="ctr"/>
-          <a:lstStyle/>
-          <a:p>
-            <a:pPr indent="0" marL="0">
-              <a:buNone/>
-            </a:pPr>
-            <a:r>
-              <a:rPr lang="en-US" sz="1300" b="1" dirty="0">
-                <a:solidFill>
-                  <a:srgbClr val="1E2761"/>
-                </a:solidFill>
-                <a:latin typeface="Yu Gothic" pitchFamily="34" charset="0"/>
-                <a:ea typeface="Yu Gothic" pitchFamily="34" charset="-122"/>
-                <a:cs typeface="Yu Gothic" pitchFamily="34" charset="-120"/>
-              </a:rPr>
-              <a:t>予算を月単位にして配信量を戻す</a:t>
-            </a:r>
-            <a:endParaRPr lang="en-US" sz="1300" dirty="0"/>
-          </a:p>
-        </p:txBody>
-      </p:sp>
-      <p:sp>
-        <p:nvSpPr>
-          <p:cNvPr id="8" name="Text 6"/>
-          <p:cNvSpPr/>
-          <p:nvPr/>
-        </p:nvSpPr>
-        <p:spPr>
-          <a:xfrm>
-            <a:off x="1691640" y="1572768"/>
-            <a:ext cx="4206240" cy="411480"/>
-          </a:xfrm>
-          <a:prstGeom prst="rect">
-            <a:avLst/>
-          </a:prstGeom>
-          <a:noFill/>
-          <a:ln/>
-        </p:spPr>
-        <p:txBody>
-          <a:bodyPr wrap="square" lIns="0" tIns="0" rIns="0" bIns="0" rtlCol="0" anchor="t"/>
-          <a:lstStyle/>
-          <a:p>
-            <a:pPr indent="0" marL="0">
-              <a:buNone/>
-            </a:pPr>
-            <a:r>
-              <a:rPr lang="en-US" sz="950" dirty="0">
-                <a:solidFill>
-                  <a:srgbClr val="5A6478"/>
-                </a:solidFill>
-                <a:latin typeface="Yu Gothic" pitchFamily="34" charset="0"/>
-                <a:ea typeface="Yu Gothic" pitchFamily="34" charset="-122"/>
-                <a:cs typeface="Yu Gothic" pitchFamily="34" charset="-120"/>
-              </a:rPr>
-              <a:t>9/16〜10/31の通し予算を9月後半に52%使い、10月は1日¥1,455まで低下。</a:t>
-            </a:r>
-            <a:endParaRPr lang="en-US" sz="950" dirty="0"/>
-          </a:p>
-        </p:txBody>
-      </p:sp>
-      <p:sp>
-        <p:nvSpPr>
-          <p:cNvPr id="9" name="Text 7"/>
-          <p:cNvSpPr/>
-          <p:nvPr/>
-        </p:nvSpPr>
-        <p:spPr>
-          <a:xfrm>
-            <a:off x="6035040" y="1188720"/>
-            <a:ext cx="5486400" cy="777240"/>
-          </a:xfrm>
-          <a:prstGeom prst="rect">
-            <a:avLst/>
-          </a:prstGeom>
-          <a:noFill/>
-          <a:ln/>
-        </p:spPr>
-        <p:txBody>
-          <a:bodyPr wrap="square" lIns="0" tIns="0" rIns="0" bIns="0" rtlCol="0" anchor="ctr"/>
-          <a:lstStyle/>
-          <a:p>
-            <a:pPr indent="0" marL="0">
-              <a:lnSpc>
-                <a:spcPct val="105000"/>
-              </a:lnSpc>
-              <a:buNone/>
-            </a:pPr>
-            <a:r>
-              <a:rPr lang="en-US" sz="1050" dirty="0">
-                <a:solidFill>
-                  <a:srgbClr val="1F2430"/>
-                </a:solidFill>
-                <a:latin typeface="Yu Gothic" pitchFamily="34" charset="0"/>
-                <a:ea typeface="Yu Gothic" pitchFamily="34" charset="-122"/>
-                <a:cs typeface="Yu Gothic" pitchFamily="34" charset="-120"/>
-              </a:rPr>
-              <a:t>11月からは月ごとの予算（または1日あたりの予算）で組み、日々の配信量をならす。10/21〜31の残り¥36,593の使い方も運用担当（SHO-SAN）と確認。</a:t>
-            </a:r>
-            <a:endParaRPr lang="en-US" sz="1050" dirty="0"/>
-          </a:p>
-        </p:txBody>
-      </p:sp>
-      <p:sp>
-        <p:nvSpPr>
-          <p:cNvPr id="10" name="Shape 8"/>
-          <p:cNvSpPr/>
-          <p:nvPr/>
-        </p:nvSpPr>
-        <p:spPr>
-          <a:xfrm>
-            <a:off x="548640" y="2121408"/>
-            <a:ext cx="11091672" cy="932688"/>
-          </a:xfrm>
-          <a:prstGeom prst="roundRect">
-            <a:avLst>
-              <a:gd name="adj" fmla="val 5882"/>
-            </a:avLst>
-          </a:prstGeom>
-          <a:solidFill>
-            <a:srgbClr val="FBFCFE"/>
-          </a:solidFill>
-          <a:ln w="12700">
-            <a:solidFill>
-              <a:srgbClr val="D9E2F2"/>
-            </a:solidFill>
-            <a:prstDash val="solid"/>
-          </a:ln>
-        </p:spPr>
-      </p:sp>
-      <p:sp>
-        <p:nvSpPr>
-          <p:cNvPr id="11" name="Shape 9"/>
-          <p:cNvSpPr/>
-          <p:nvPr/>
-        </p:nvSpPr>
-        <p:spPr>
-          <a:xfrm>
-            <a:off x="685800" y="2249424"/>
-            <a:ext cx="868680" cy="310896"/>
-          </a:xfrm>
-          <a:prstGeom prst="roundRect">
-            <a:avLst>
-              <a:gd name="adj" fmla="val 14706"/>
-            </a:avLst>
-          </a:prstGeom>
-          <a:solidFill>
-            <a:srgbClr val="E8A33D"/>
-          </a:solidFill>
-          <a:ln/>
-        </p:spPr>
-      </p:sp>
-      <p:sp>
-        <p:nvSpPr>
-          <p:cNvPr id="12" name="Text 10"/>
-          <p:cNvSpPr/>
-          <p:nvPr/>
-        </p:nvSpPr>
-        <p:spPr>
-          <a:xfrm>
-            <a:off x="685800" y="2249424"/>
-            <a:ext cx="868680" cy="310896"/>
-          </a:xfrm>
-          <a:prstGeom prst="rect">
-            <a:avLst/>
-          </a:prstGeom>
-          <a:noFill/>
-          <a:ln/>
-        </p:spPr>
-        <p:txBody>
-          <a:bodyPr wrap="square" lIns="0" tIns="0" rIns="0" bIns="0" rtlCol="0" anchor="ctr"/>
-          <a:lstStyle/>
-          <a:p>
-            <a:pPr algn="ctr" indent="0" marL="0">
-              <a:buNone/>
-            </a:pPr>
-            <a:r>
-              <a:rPr lang="en-US" sz="1050" b="1" dirty="0">
-                <a:solidFill>
-                  <a:srgbClr val="FFFFFF"/>
-                </a:solidFill>
-                <a:latin typeface="Yu Gothic" pitchFamily="34" charset="0"/>
-                <a:ea typeface="Yu Gothic" pitchFamily="34" charset="-122"/>
-                <a:cs typeface="Yu Gothic" pitchFamily="34" charset="-120"/>
-              </a:rPr>
-              <a:t>優先</a:t>
-            </a:r>
-            <a:endParaRPr lang="en-US" sz="1050" dirty="0"/>
-          </a:p>
-        </p:txBody>
-      </p:sp>
-      <p:sp>
-        <p:nvSpPr>
           <p:cNvPr id="13" name="Text 11"/>
           <p:cNvSpPr/>
           <p:nvPr/>
         </p:nvSpPr>
         <p:spPr>
           <a:xfrm>
-            <a:off x="1691640" y="2212848"/>
+            <a:off x="1691640" y="1280160"/>
             <a:ext cx="4206240" cy="384048"/>
           </a:xfrm>
           <a:prstGeom prst="rect">
@@ -23587,7 +23379,7 @@
         </p:nvSpPr>
         <p:spPr>
           <a:xfrm>
-            <a:off x="1691640" y="2596896"/>
+            <a:off x="1691640" y="1664208"/>
             <a:ext cx="4206240" cy="411480"/>
           </a:xfrm>
           <a:prstGeom prst="rect">
@@ -23626,7 +23418,7 @@
         </p:nvSpPr>
         <p:spPr>
           <a:xfrm>
-            <a:off x="6035040" y="2212848"/>
+            <a:off x="6035040" y="1280160"/>
             <a:ext cx="5486400" cy="777240"/>
           </a:xfrm>
           <a:prstGeom prst="rect">
@@ -23668,8 +23460,8 @@
         </p:nvSpPr>
         <p:spPr>
           <a:xfrm>
-            <a:off x="548640" y="3145536"/>
-            <a:ext cx="11091672" cy="932688"/>
+            <a:off x="548640" y="2404872"/>
+            <a:ext cx="11091672" cy="1115568"/>
           </a:xfrm>
           <a:prstGeom prst="roundRect">
             <a:avLst>
@@ -23695,7 +23487,7 @@
         </p:nvSpPr>
         <p:spPr>
           <a:xfrm>
-            <a:off x="685800" y="3273552"/>
+            <a:off x="685800" y="2624328"/>
             <a:ext cx="868680" cy="310896"/>
           </a:xfrm>
           <a:prstGeom prst="roundRect">
@@ -23717,7 +23509,7 @@
         </p:nvSpPr>
         <p:spPr>
           <a:xfrm>
-            <a:off x="685800" y="3273552"/>
+            <a:off x="685800" y="2624328"/>
             <a:ext cx="868680" cy="310896"/>
           </a:xfrm>
           <a:prstGeom prst="rect">
@@ -23756,7 +23548,7 @@
         </p:nvSpPr>
         <p:spPr>
           <a:xfrm>
-            <a:off x="1691640" y="3236976"/>
+            <a:off x="1691640" y="2587752"/>
             <a:ext cx="4206240" cy="384048"/>
           </a:xfrm>
           <a:prstGeom prst="rect">
@@ -23795,7 +23587,7 @@
         </p:nvSpPr>
         <p:spPr>
           <a:xfrm>
-            <a:off x="1691640" y="3621024"/>
+            <a:off x="1691640" y="2971800"/>
             <a:ext cx="4206240" cy="411480"/>
           </a:xfrm>
           <a:prstGeom prst="rect">
@@ -23834,7 +23626,7 @@
         </p:nvSpPr>
         <p:spPr>
           <a:xfrm>
-            <a:off x="6035040" y="3236976"/>
+            <a:off x="6035040" y="2587752"/>
             <a:ext cx="5486400" cy="777240"/>
           </a:xfrm>
           <a:prstGeom prst="rect">
@@ -23876,8 +23668,8 @@
         </p:nvSpPr>
         <p:spPr>
           <a:xfrm>
-            <a:off x="548640" y="4169664"/>
-            <a:ext cx="11091672" cy="932688"/>
+            <a:off x="548640" y="3712464"/>
+            <a:ext cx="11091672" cy="1115568"/>
           </a:xfrm>
           <a:prstGeom prst="roundRect">
             <a:avLst>
@@ -23903,7 +23695,7 @@
         </p:nvSpPr>
         <p:spPr>
           <a:xfrm>
-            <a:off x="685800" y="4297680"/>
+            <a:off x="685800" y="3931920"/>
             <a:ext cx="868680" cy="310896"/>
           </a:xfrm>
           <a:prstGeom prst="roundRect">
@@ -23925,7 +23717,7 @@
         </p:nvSpPr>
         <p:spPr>
           <a:xfrm>
-            <a:off x="685800" y="4297680"/>
+            <a:off x="685800" y="3931920"/>
             <a:ext cx="868680" cy="310896"/>
           </a:xfrm>
           <a:prstGeom prst="rect">
@@ -23964,7 +23756,7 @@
         </p:nvSpPr>
         <p:spPr>
           <a:xfrm>
-            <a:off x="1691640" y="4261104"/>
+            <a:off x="1691640" y="3895344"/>
             <a:ext cx="4206240" cy="384048"/>
           </a:xfrm>
           <a:prstGeom prst="rect">
@@ -24003,7 +23795,7 @@
         </p:nvSpPr>
         <p:spPr>
           <a:xfrm>
-            <a:off x="1691640" y="4645152"/>
+            <a:off x="1691640" y="4279392"/>
             <a:ext cx="4206240" cy="411480"/>
           </a:xfrm>
           <a:prstGeom prst="rect">
@@ -24042,7 +23834,7 @@
         </p:nvSpPr>
         <p:spPr>
           <a:xfrm>
-            <a:off x="6035040" y="4261104"/>
+            <a:off x="6035040" y="3895344"/>
             <a:ext cx="5486400" cy="777240"/>
           </a:xfrm>
           <a:prstGeom prst="rect">
@@ -24084,8 +23876,8 @@
         </p:nvSpPr>
         <p:spPr>
           <a:xfrm>
-            <a:off x="548640" y="5193792"/>
-            <a:ext cx="11091672" cy="932688"/>
+            <a:off x="548640" y="5020056"/>
+            <a:ext cx="11091672" cy="1115568"/>
           </a:xfrm>
           <a:prstGeom prst="roundRect">
             <a:avLst>
@@ -24111,7 +23903,7 @@
         </p:nvSpPr>
         <p:spPr>
           <a:xfrm>
-            <a:off x="685800" y="5321808"/>
+            <a:off x="685800" y="5239512"/>
             <a:ext cx="868680" cy="310896"/>
           </a:xfrm>
           <a:prstGeom prst="roundRect">
@@ -24133,7 +23925,7 @@
         </p:nvSpPr>
         <p:spPr>
           <a:xfrm>
-            <a:off x="685800" y="5321808"/>
+            <a:off x="685800" y="5239512"/>
             <a:ext cx="868680" cy="310896"/>
           </a:xfrm>
           <a:prstGeom prst="rect">
@@ -24172,7 +23964,7 @@
         </p:nvSpPr>
         <p:spPr>
           <a:xfrm>
-            <a:off x="1691640" y="5285232"/>
+            <a:off x="1691640" y="5202936"/>
             <a:ext cx="4206240" cy="384048"/>
           </a:xfrm>
           <a:prstGeom prst="rect">
@@ -24211,7 +24003,7 @@
         </p:nvSpPr>
         <p:spPr>
           <a:xfrm>
-            <a:off x="1691640" y="5669280"/>
+            <a:off x="1691640" y="5586984"/>
             <a:ext cx="4206240" cy="411480"/>
           </a:xfrm>
           <a:prstGeom prst="rect">
@@ -24250,7 +24042,7 @@
         </p:nvSpPr>
         <p:spPr>
           <a:xfrm>
-            <a:off x="6035040" y="5285232"/>
+            <a:off x="6035040" y="5202936"/>
             <a:ext cx="5486400" cy="777240"/>
           </a:xfrm>
           <a:prstGeom prst="rect">
@@ -24278,7 +24070,7 @@
                 <a:ea typeface="Yu Gothic" pitchFamily="34" charset="-122"/>
                 <a:cs typeface="Yu Gothic" pitchFamily="34" charset="-120"/>
               </a:rPr>
-              <a:t>Googleの配信量を戻しても獲得が伸びない場合は、Metaとの併用を選択肢に。まずは①②の効果を11月前半で見る。</a:t>
+              <a:t>今の予算でGoogleの獲得が伸びない場合は、Metaへの切り替えや併用を選択肢に。まずは①②の効果を11月前半で見る。</a:t>
             </a:r>
             <a:endParaRPr lang="en-US" sz="1050" dirty="0"/>
           </a:p>
@@ -24536,13 +24328,13 @@
       </p:sp>
       <p:sp>
         <p:nvSpPr>
-          <p:cNvPr id="5" name="Shape 3"/>
+          <p:cNvPr id="8" name="Shape 6"/>
           <p:cNvSpPr/>
           <p:nvPr/>
         </p:nvSpPr>
         <p:spPr>
           <a:xfrm>
-            <a:off x="640080" y="2944368"/>
+            <a:off x="640080" y="2990088"/>
             <a:ext cx="457200" cy="457200"/>
           </a:xfrm>
           <a:prstGeom prst="ellipse">
@@ -24556,13 +24348,13 @@
       </p:sp>
       <p:sp>
         <p:nvSpPr>
-          <p:cNvPr id="6" name="Text 4"/>
+          <p:cNvPr id="9" name="Text 7"/>
           <p:cNvSpPr/>
           <p:nvPr/>
         </p:nvSpPr>
         <p:spPr>
           <a:xfrm>
-            <a:off x="640080" y="2926080"/>
+            <a:off x="640080" y="2971800"/>
             <a:ext cx="457200" cy="457200"/>
           </a:xfrm>
           <a:prstGeom prst="rect">
@@ -24595,142 +24387,13 @@
       </p:sp>
       <p:sp>
         <p:nvSpPr>
-          <p:cNvPr id="7" name="Text 5"/>
-          <p:cNvSpPr/>
-          <p:nvPr/>
-        </p:nvSpPr>
-        <p:spPr>
-          <a:xfrm>
-            <a:off x="1371600" y="2834640"/>
-            <a:ext cx="10241280" cy="777240"/>
-          </a:xfrm>
-          <a:prstGeom prst="rect">
-            <a:avLst/>
-          </a:prstGeom>
-          <a:noFill/>
-          <a:ln/>
-        </p:spPr>
-        <p:txBody>
-          <a:bodyPr wrap="square" lIns="0" tIns="0" rIns="0" bIns="0" rtlCol="0" anchor="t"/>
-          <a:lstStyle/>
-          <a:p>
-            <a:pPr indent="0" marL="0">
-              <a:buNone/>
-            </a:pPr>
-            <a:r>
-              <a:rPr lang="en-US" sz="1500" b="1" dirty="0">
-                <a:solidFill>
-                  <a:srgbClr val="FFFFFF"/>
-                </a:solidFill>
-                <a:latin typeface="Yu Gothic" pitchFamily="34" charset="0"/>
-                <a:ea typeface="Yu Gothic" pitchFamily="34" charset="-122"/>
-                <a:cs typeface="Yu Gothic" pitchFamily="34" charset="-120"/>
-              </a:rPr>
-              <a:t>10月残りと11月の予算の組み方を決める　</a:t>
-            </a:r>
-            <a:pPr indent="0" marL="0">
-              <a:buNone/>
-            </a:pPr>
-            <a:r>
-              <a:rPr lang="en-US" sz="1200" b="1" dirty="0">
-                <a:solidFill>
-                  <a:srgbClr val="CADCFC"/>
-                </a:solidFill>
-                <a:latin typeface="Yu Gothic" pitchFamily="34" charset="0"/>
-                <a:ea typeface="Yu Gothic" pitchFamily="34" charset="-122"/>
-                <a:cs typeface="Yu Gothic" pitchFamily="34" charset="-120"/>
-              </a:rPr>
-              <a:t>［今週］</a:t>
-            </a:r>
-            <a:endParaRPr lang="en-US" sz="1500" dirty="0"/>
-          </a:p>
-          <a:p>
-            <a:pPr indent="0" marL="0">
-              <a:buNone/>
-            </a:pPr>
-            <a:r>
-              <a:rPr lang="en-US" sz="1200" dirty="0">
-                <a:solidFill>
-                  <a:srgbClr val="CADCFC"/>
-                </a:solidFill>
-                <a:latin typeface="Yu Gothic" pitchFamily="34" charset="0"/>
-                <a:ea typeface="Yu Gothic" pitchFamily="34" charset="-122"/>
-                <a:cs typeface="Yu Gothic" pitchFamily="34" charset="-120"/>
-              </a:rPr>
-              <a:t>運用担当（SHO-SAN）と確認。11月は月単位の予算で配信量をならす。</a:t>
-            </a:r>
-            <a:endParaRPr lang="en-US" sz="1500" dirty="0"/>
-          </a:p>
-        </p:txBody>
-      </p:sp>
-      <p:sp>
-        <p:nvSpPr>
-          <p:cNvPr id="8" name="Shape 6"/>
-          <p:cNvSpPr/>
-          <p:nvPr/>
-        </p:nvSpPr>
-        <p:spPr>
-          <a:xfrm>
-            <a:off x="640080" y="3813048"/>
-            <a:ext cx="457200" cy="457200"/>
-          </a:xfrm>
-          <a:prstGeom prst="ellipse">
-            <a:avLst/>
-          </a:prstGeom>
-          <a:solidFill>
-            <a:srgbClr val="F96167"/>
-          </a:solidFill>
-          <a:ln/>
-        </p:spPr>
-      </p:sp>
-      <p:sp>
-        <p:nvSpPr>
-          <p:cNvPr id="9" name="Text 7"/>
-          <p:cNvSpPr/>
-          <p:nvPr/>
-        </p:nvSpPr>
-        <p:spPr>
-          <a:xfrm>
-            <a:off x="640080" y="3794760"/>
-            <a:ext cx="457200" cy="457200"/>
-          </a:xfrm>
-          <a:prstGeom prst="rect">
-            <a:avLst/>
-          </a:prstGeom>
-          <a:noFill/>
-          <a:ln/>
-        </p:spPr>
-        <p:txBody>
-          <a:bodyPr wrap="square" lIns="0" tIns="0" rIns="0" bIns="0" rtlCol="0" anchor="ctr"/>
-          <a:lstStyle/>
-          <a:p>
-            <a:pPr algn="ctr" indent="0" marL="0">
-              <a:buNone/>
-            </a:pPr>
-            <a:r>
-              <a:rPr lang="en-US" sz="1800" b="1" dirty="0">
-                <a:solidFill>
-                  <a:srgbClr val="FFFFFF"/>
-                </a:solidFill>
-                <a:latin typeface="Yu Gothic" pitchFamily="34" charset="0"/>
-                <a:ea typeface="Yu Gothic" pitchFamily="34" charset="-122"/>
-                <a:cs typeface="Yu Gothic" pitchFamily="34" charset="-120"/>
-              </a:rPr>
-              <a:t>2</a:t>
-            </a:r>
-            <a:endParaRPr lang="en-US" sz="1800" dirty="0"/>
-          </a:p>
-        </p:txBody>
-      </p:sp>
-      <p:sp>
-        <p:nvSpPr>
           <p:cNvPr id="10" name="Text 8"/>
           <p:cNvSpPr/>
           <p:nvPr/>
         </p:nvSpPr>
         <p:spPr>
           <a:xfrm>
-            <a:off x="1371600" y="3703320"/>
+            <a:off x="1371600" y="2880360"/>
             <a:ext cx="10241280" cy="777240"/>
           </a:xfrm>
           <a:prstGeom prst="rect">
@@ -24800,7 +24463,7 @@
         </p:nvSpPr>
         <p:spPr>
           <a:xfrm>
-            <a:off x="640080" y="4681728"/>
+            <a:off x="640080" y="4069080"/>
             <a:ext cx="457200" cy="457200"/>
           </a:xfrm>
           <a:prstGeom prst="ellipse">
@@ -24820,7 +24483,7 @@
         </p:nvSpPr>
         <p:spPr>
           <a:xfrm>
-            <a:off x="640080" y="4663440"/>
+            <a:off x="640080" y="4050792"/>
             <a:ext cx="457200" cy="457200"/>
           </a:xfrm>
           <a:prstGeom prst="rect">
@@ -24845,7 +24508,7 @@
                 <a:ea typeface="Yu Gothic" pitchFamily="34" charset="-122"/>
                 <a:cs typeface="Yu Gothic" pitchFamily="34" charset="-120"/>
               </a:rPr>
-              <a:t>3</a:t>
+              <a:t>2</a:t>
             </a:r>
             <a:endParaRPr lang="en-US" sz="1800" dirty="0"/>
           </a:p>
@@ -24859,7 +24522,7 @@
         </p:nvSpPr>
         <p:spPr>
           <a:xfrm>
-            <a:off x="1371600" y="4572000"/>
+            <a:off x="1371600" y="3959352"/>
             <a:ext cx="10241280" cy="777240"/>
           </a:xfrm>
           <a:prstGeom prst="rect">
@@ -24929,7 +24592,7 @@
         </p:nvSpPr>
         <p:spPr>
           <a:xfrm>
-            <a:off x="640080" y="5550408"/>
+            <a:off x="640080" y="5148072"/>
             <a:ext cx="457200" cy="457200"/>
           </a:xfrm>
           <a:prstGeom prst="ellipse">
@@ -24949,7 +24612,7 @@
         </p:nvSpPr>
         <p:spPr>
           <a:xfrm>
-            <a:off x="640080" y="5532120"/>
+            <a:off x="640080" y="5129784"/>
             <a:ext cx="457200" cy="457200"/>
           </a:xfrm>
           <a:prstGeom prst="rect">
@@ -24974,7 +24637,7 @@
                 <a:ea typeface="Yu Gothic" pitchFamily="34" charset="-122"/>
                 <a:cs typeface="Yu Gothic" pitchFamily="34" charset="-120"/>
               </a:rPr>
-              <a:t>4</a:t>
+              <a:t>3</a:t>
             </a:r>
             <a:endParaRPr lang="en-US" sz="1800" dirty="0"/>
           </a:p>
@@ -24988,7 +24651,7 @@
         </p:nvSpPr>
         <p:spPr>
           <a:xfrm>
-            <a:off x="1371600" y="5440680"/>
+            <a:off x="1371600" y="5038344"/>
             <a:ext cx="10241280" cy="777240"/>
           </a:xfrm>
           <a:prstGeom prst="rect">
